--- a/Onyx_進度報告_1027.pptx
+++ b/Onyx_進度報告_1027.pptx
@@ -1820,7 +1820,15 @@
             <a:pPr marL="0" indent="0"/>
             <a:r>
               <a:rPr lang="zh-TW" altLang="en-US" dirty="0"/>
-              <a:t>並沒有找到開發版在支援</a:t>
+              <a:t>除了 </a:t>
+            </a:r>
+            <a:r>
+              <a:rPr lang="en-US" altLang="zh-TW" dirty="0"/>
+              <a:t>ZCU106</a:t>
+            </a:r>
+            <a:r>
+              <a:rPr lang="zh-TW" altLang="en-US" dirty="0"/>
+              <a:t> 外，並沒有找到合適的開發版在支援 </a:t>
             </a:r>
             <a:r>
               <a:rPr lang="en-US" altLang="zh-TW" dirty="0" err="1"/>
@@ -1828,7 +1836,7 @@
             </a:r>
             <a:r>
               <a:rPr lang="zh-TW" altLang="en-US" dirty="0"/>
-              <a:t>的同時也支援</a:t>
+              <a:t> 的同時硬體也支援 </a:t>
             </a:r>
             <a:r>
               <a:rPr lang="en-US" altLang="zh-TW" dirty="0"/>

--- a/Onyx_進度報告_1027.pptx
+++ b/Onyx_進度報告_1027.pptx
@@ -2340,18 +2340,10 @@
           <a:p>
             <a:pPr marL="0" indent="0"/>
             <a:r>
-              <a:rPr lang="zh-TW" altLang="zh-TW" b="1" dirty="0"/>
-              <a:t>HDMI 接口差分線根本沒有連到普通 I/O</a:t>
-            </a:r>
-            <a:r>
-              <a:rPr lang="zh-TW" altLang="zh-TW" dirty="0"/>
-              <a:t>，而是直接焊進了 UltraScale+ 的 </a:t>
-            </a:r>
-            <a:r>
-              <a:rPr lang="zh-TW" altLang="zh-TW" b="1" dirty="0"/>
-              <a:t>GTH 專用高速收發器</a:t>
-            </a:r>
-            <a:endParaRPr lang="zh-TW" altLang="en-US" dirty="0"/>
+              <a:rPr lang="zh-TW" altLang="zh-TW" b="0" dirty="0"/>
+              <a:t>HDMI 接口差分線根本沒有連到普通 I/O，而是直接焊進了 UltraScale+ 的 GTH 專用高速收發器</a:t>
+            </a:r>
+            <a:endParaRPr lang="zh-TW" altLang="en-US" b="0" dirty="0"/>
           </a:p>
         </p:txBody>
       </p:sp>
@@ -7883,11 +7875,17 @@
           <p:cNvGraphicFramePr>
             <a:graphicFrameLocks noGrp="1"/>
           </p:cNvGraphicFramePr>
-          <p:nvPr/>
+          <p:nvPr>
+            <p:extLst>
+              <p:ext uri="{D42A27DB-BD31-4B8C-83A1-F6EECF244321}">
+                <p14:modId xmlns:p14="http://schemas.microsoft.com/office/powerpoint/2010/main" val="2498438110"/>
+              </p:ext>
+            </p:extLst>
+          </p:nvPr>
         </p:nvGraphicFramePr>
         <p:xfrm>
-          <a:off x="1074253" y="1334356"/>
-          <a:ext cx="7757493" cy="4629004"/>
+          <a:off x="1074253" y="1263411"/>
+          <a:ext cx="7757493" cy="4829963"/>
         </p:xfrm>
         <a:graphic>
           <a:graphicData uri="http://schemas.openxmlformats.org/drawingml/2006/table">
@@ -7918,7 +7916,7 @@
                   </a:extLst>
                 </a:gridCol>
               </a:tblGrid>
-              <a:tr h="701541">
+              <a:tr h="630219">
                 <a:tc>
                   <a:txBody>
                     <a:bodyPr/>
@@ -8003,7 +8001,7 @@
                   </a:ext>
                 </a:extLst>
               </a:tr>
-              <a:tr h="747566">
+              <a:tr h="671565">
                 <a:tc>
                   <a:txBody>
                     <a:bodyPr/>
@@ -8244,7 +8242,7 @@
                   </a:ext>
                 </a:extLst>
               </a:tr>
-              <a:tr h="937199">
+              <a:tr h="841919">
                 <a:tc>
                   <a:txBody>
                     <a:bodyPr/>
@@ -8448,7 +8446,7 @@
                   </a:ext>
                 </a:extLst>
               </a:tr>
-              <a:tr h="747566">
+              <a:tr h="671565">
                 <a:tc>
                   <a:txBody>
                     <a:bodyPr/>
@@ -8550,7 +8548,7 @@
                   </a:ext>
                 </a:extLst>
               </a:tr>
-              <a:tr h="747566">
+              <a:tr h="671565">
                 <a:tc>
                   <a:txBody>
                     <a:bodyPr/>
@@ -8663,7 +8661,7 @@
                   </a:ext>
                 </a:extLst>
               </a:tr>
-              <a:tr h="747566">
+              <a:tr h="671565">
                 <a:tc>
                   <a:txBody>
                     <a:bodyPr/>
@@ -8799,6 +8797,183 @@
                   </a:ext>
                 </a:extLst>
               </a:tr>
+              <a:tr h="671565">
+                <a:tc>
+                  <a:txBody>
+                    <a:bodyPr/>
+                    <a:lstStyle/>
+                    <a:p>
+                      <a:pPr algn="ctr" fontAlgn="ctr"/>
+                      <a:r>
+                        <a:rPr lang="zh-TW" altLang="en-US" sz="1600" b="0" i="0" u="none" strike="noStrike" dirty="0">
+                          <a:solidFill>
+                            <a:schemeClr val="tx1"/>
+                          </a:solidFill>
+                          <a:effectLst/>
+                          <a:latin typeface="Times New Roman" panose="02020603050405020304" pitchFamily="18" charset="0"/>
+                          <a:ea typeface="標楷體" panose="03000509000000000000" pitchFamily="65" charset="-120"/>
+                          <a:cs typeface="Times New Roman" panose="02020603050405020304" pitchFamily="18" charset="0"/>
+                        </a:rPr>
+                        <a:t>備註：開源專案 </a:t>
+                      </a:r>
+                      <a:r>
+                        <a:rPr lang="en-US" altLang="zh-TW" sz="1600" b="0" i="0" u="none" strike="noStrike" dirty="0">
+                          <a:solidFill>
+                            <a:schemeClr val="tx1"/>
+                          </a:solidFill>
+                          <a:effectLst/>
+                          <a:latin typeface="Times New Roman" panose="02020603050405020304" pitchFamily="18" charset="0"/>
+                          <a:ea typeface="標楷體" panose="03000509000000000000" pitchFamily="65" charset="-120"/>
+                          <a:cs typeface="Times New Roman" panose="02020603050405020304" pitchFamily="18" charset="0"/>
+                        </a:rPr>
+                        <a:t>/ </a:t>
+                      </a:r>
+                      <a:r>
+                        <a:rPr lang="zh-TW" altLang="en-US" sz="1600" b="0" i="0" u="none" strike="noStrike" dirty="0">
+                          <a:solidFill>
+                            <a:schemeClr val="tx1"/>
+                          </a:solidFill>
+                          <a:effectLst/>
+                          <a:latin typeface="Times New Roman" panose="02020603050405020304" pitchFamily="18" charset="0"/>
+                          <a:ea typeface="標楷體" panose="03000509000000000000" pitchFamily="65" charset="-120"/>
+                          <a:cs typeface="Times New Roman" panose="02020603050405020304" pitchFamily="18" charset="0"/>
+                        </a:rPr>
+                        <a:t>開發版</a:t>
+                      </a:r>
+                    </a:p>
+                  </a:txBody>
+                  <a:tcPr marL="10404" marR="10404" marT="10404" marB="0" anchor="ctr"/>
+                </a:tc>
+                <a:tc>
+                  <a:txBody>
+                    <a:bodyPr/>
+                    <a:lstStyle/>
+                    <a:p>
+                      <a:pPr marL="285750" indent="-285750">
+                        <a:buFont typeface="Wingdings" panose="05000000000000000000" pitchFamily="2" charset="2"/>
+                        <a:buChar char="Ø"/>
+                      </a:pPr>
+                      <a:r>
+                        <a:rPr lang="en-US" altLang="zh-TW" sz="1600" dirty="0">
+                          <a:latin typeface="Times New Roman" panose="02020603050405020304" pitchFamily="18" charset="0"/>
+                          <a:ea typeface="標楷體" panose="03000509000000000000" pitchFamily="65" charset="-120"/>
+                          <a:cs typeface="Times New Roman" panose="02020603050405020304" pitchFamily="18" charset="0"/>
+                        </a:rPr>
+                        <a:t>NeTV2-FPGA</a:t>
+                      </a:r>
+                      <a:endParaRPr lang="en-US" altLang="zh-TW" sz="1600" dirty="0">
+                        <a:solidFill>
+                          <a:schemeClr val="tx1"/>
+                        </a:solidFill>
+                        <a:latin typeface="Times New Roman" panose="02020603050405020304" pitchFamily="18" charset="0"/>
+                        <a:ea typeface="標楷體" panose="03000509000000000000" pitchFamily="65" charset="-120"/>
+                        <a:cs typeface="Times New Roman" panose="02020603050405020304" pitchFamily="18" charset="0"/>
+                      </a:endParaRPr>
+                    </a:p>
+                    <a:p>
+                      <a:pPr marL="285750" indent="-285750">
+                        <a:buFont typeface="Wingdings" panose="05000000000000000000" pitchFamily="2" charset="2"/>
+                        <a:buChar char="Ø"/>
+                      </a:pPr>
+                      <a:r>
+                        <a:rPr lang="en-US" altLang="zh-TW" sz="1600" dirty="0">
+                          <a:solidFill>
+                            <a:schemeClr val="tx1"/>
+                          </a:solidFill>
+                          <a:latin typeface="Times New Roman" panose="02020603050405020304" pitchFamily="18" charset="0"/>
+                          <a:ea typeface="標楷體" panose="03000509000000000000" pitchFamily="65" charset="-120"/>
+                          <a:cs typeface="Times New Roman" panose="02020603050405020304" pitchFamily="18" charset="0"/>
+                        </a:rPr>
+                        <a:t>NeTV2</a:t>
+                      </a:r>
+                      <a:endParaRPr lang="zh-TW" altLang="en-US" sz="1600" dirty="0">
+                        <a:solidFill>
+                          <a:schemeClr val="tx1"/>
+                        </a:solidFill>
+                        <a:latin typeface="Times New Roman" panose="02020603050405020304" pitchFamily="18" charset="0"/>
+                        <a:ea typeface="標楷體" panose="03000509000000000000" pitchFamily="65" charset="-120"/>
+                        <a:cs typeface="Times New Roman" panose="02020603050405020304" pitchFamily="18" charset="0"/>
+                      </a:endParaRPr>
+                    </a:p>
+                  </a:txBody>
+                  <a:tcPr marL="10404" marR="10404" marT="10404" marB="0" anchor="ctr"/>
+                </a:tc>
+                <a:tc>
+                  <a:txBody>
+                    <a:bodyPr/>
+                    <a:lstStyle/>
+                    <a:p>
+                      <a:pPr marL="285750" marR="0" lvl="0" indent="-285750" algn="l" defTabSz="914400" rtl="0" eaLnBrk="1" fontAlgn="auto" latinLnBrk="0" hangingPunct="1">
+                        <a:lnSpc>
+                          <a:spcPct val="100000"/>
+                        </a:lnSpc>
+                        <a:spcBef>
+                          <a:spcPts val="0"/>
+                        </a:spcBef>
+                        <a:spcAft>
+                          <a:spcPts val="0"/>
+                        </a:spcAft>
+                        <a:buClr>
+                          <a:srgbClr val="000000"/>
+                        </a:buClr>
+                        <a:buSzTx/>
+                        <a:buFont typeface="Wingdings" panose="05000000000000000000" pitchFamily="2" charset="2"/>
+                        <a:buChar char="Ø"/>
+                        <a:tabLst/>
+                        <a:defRPr/>
+                      </a:pPr>
+                      <a:r>
+                        <a:rPr lang="en-US" altLang="zh-TW" sz="1600" dirty="0">
+                          <a:latin typeface="Times New Roman" panose="02020603050405020304" pitchFamily="18" charset="0"/>
+                          <a:ea typeface="標楷體" panose="03000509000000000000" pitchFamily="65" charset="-120"/>
+                          <a:cs typeface="Times New Roman" panose="02020603050405020304" pitchFamily="18" charset="0"/>
+                        </a:rPr>
+                        <a:t>Video-Example-Designs</a:t>
+                      </a:r>
+                    </a:p>
+                    <a:p>
+                      <a:pPr marL="285750" marR="0" lvl="0" indent="-285750" algn="l" defTabSz="914400" rtl="0" eaLnBrk="1" fontAlgn="auto" latinLnBrk="0" hangingPunct="1">
+                        <a:lnSpc>
+                          <a:spcPct val="100000"/>
+                        </a:lnSpc>
+                        <a:spcBef>
+                          <a:spcPts val="0"/>
+                        </a:spcBef>
+                        <a:spcAft>
+                          <a:spcPts val="0"/>
+                        </a:spcAft>
+                        <a:buClr>
+                          <a:srgbClr val="000000"/>
+                        </a:buClr>
+                        <a:buSzTx/>
+                        <a:buFont typeface="Wingdings" panose="05000000000000000000" pitchFamily="2" charset="2"/>
+                        <a:buChar char="Ø"/>
+                        <a:tabLst/>
+                        <a:defRPr/>
+                      </a:pPr>
+                      <a:r>
+                        <a:rPr lang="zh-TW" altLang="zh-TW" sz="1600" dirty="0">
+                          <a:latin typeface="Times New Roman" panose="02020603050405020304" pitchFamily="18" charset="0"/>
+                          <a:ea typeface="標楷體" panose="03000509000000000000" pitchFamily="65" charset="-120"/>
+                          <a:cs typeface="Times New Roman" panose="02020603050405020304" pitchFamily="18" charset="0"/>
+                        </a:rPr>
+                        <a:t>Xilinx ZCU106</a:t>
+                      </a:r>
+                      <a:endParaRPr lang="en-US" altLang="zh-TW" sz="1600" dirty="0">
+                        <a:latin typeface="Times New Roman" panose="02020603050405020304" pitchFamily="18" charset="0"/>
+                        <a:ea typeface="標楷體" panose="03000509000000000000" pitchFamily="65" charset="-120"/>
+                        <a:cs typeface="Times New Roman" panose="02020603050405020304" pitchFamily="18" charset="0"/>
+                      </a:endParaRPr>
+                    </a:p>
+                  </a:txBody>
+                  <a:tcPr marL="10404" marR="10404" marT="10404" marB="0" anchor="ctr"/>
+                </a:tc>
+                <a:extLst>
+                  <a:ext uri="{0D108BD9-81ED-4DB2-BD59-A6C34878D82A}">
+                    <a16:rowId xmlns:a16="http://schemas.microsoft.com/office/drawing/2014/main" val="4254576219"/>
+                  </a:ext>
+                </a:extLst>
+              </a:tr>
             </a:tbl>
           </a:graphicData>
         </a:graphic>
@@ -9573,10 +9748,10 @@
       </p:pic>
       <p:pic>
         <p:nvPicPr>
-          <p:cNvPr id="6" name="圖片 5">
+          <p:cNvPr id="5" name="圖片 4">
             <a:extLst>
               <a:ext uri="{FF2B5EF4-FFF2-40B4-BE49-F238E27FC236}">
-                <a16:creationId xmlns:a16="http://schemas.microsoft.com/office/drawing/2014/main" id="{04C28CC9-9244-AB58-A335-4D4EFA3A4297}"/>
+                <a16:creationId xmlns:a16="http://schemas.microsoft.com/office/drawing/2014/main" id="{DFE3B599-6A9B-B4EE-9B9E-113152A6018C}"/>
               </a:ext>
             </a:extLst>
           </p:cNvPr>
@@ -9593,8 +9768,8 @@
         </p:blipFill>
         <p:spPr>
           <a:xfrm>
-            <a:off x="1129175" y="5492307"/>
-            <a:ext cx="8257251" cy="866853"/>
+            <a:off x="1200121" y="5502105"/>
+            <a:ext cx="8257250" cy="847258"/>
           </a:xfrm>
           <a:prstGeom prst="rect">
             <a:avLst/>
@@ -9986,7 +10161,15 @@
             </a:pPr>
             <a:r>
               <a:rPr lang="zh-TW" altLang="zh-TW" sz="1600" dirty="0"/>
-              <a:t>2 x HDMI type A inputs, 1 x HDMI type A output, 1 x HDMI type D output</a:t>
+              <a:t>2 x HDMI type A inputs, 1 x HDMI type A output, 1 x </a:t>
+            </a:r>
+            <a:r>
+              <a:rPr lang="en-US" altLang="zh-TW" sz="1600" dirty="0"/>
+              <a:t>Micro HDMI</a:t>
+            </a:r>
+            <a:r>
+              <a:rPr lang="zh-TW" altLang="zh-TW" sz="1600" dirty="0"/>
+              <a:t> output</a:t>
             </a:r>
             <a:endParaRPr lang="en-US" altLang="zh-TW" sz="1600" dirty="0"/>
           </a:p>
@@ -10568,7 +10751,7 @@
                 <a:ea typeface="標楷體" panose="03000509000000000000" pitchFamily="65" charset="-120"/>
                 <a:cs typeface="Times New Roman" panose="02020603050405020304" pitchFamily="18" charset="0"/>
               </a:rPr>
-              <a:t>子卡輸入通道之可行性</a:t>
+              <a:t>訊號輸入通道之可行性</a:t>
             </a:r>
             <a:endParaRPr lang="en-US" altLang="zh-TW" sz="2000" dirty="0">
               <a:solidFill>
@@ -10599,7 +10782,7 @@
                 <a:ea typeface="標楷體" panose="03000509000000000000" pitchFamily="65" charset="-120"/>
                 <a:cs typeface="Times New Roman" panose="02020603050405020304" pitchFamily="18" charset="0"/>
               </a:rPr>
-              <a:t>影像總資料量</a:t>
+              <a:t>影像傳輸資料量</a:t>
             </a:r>
             <a:r>
               <a:rPr lang="zh-TW" altLang="zh-TW" sz="1600" dirty="0">
@@ -10703,7 +10886,45 @@
                 <a:ea typeface="標楷體" panose="03000509000000000000" pitchFamily="65" charset="-120"/>
                 <a:cs typeface="Times New Roman" panose="02020603050405020304" pitchFamily="18" charset="0"/>
               </a:rPr>
-              <a:t>3.3 V 直流偏壓與輸出電壓不一致</a:t>
+              <a:t>3.3V 直流偏壓與</a:t>
+            </a:r>
+            <a:r>
+              <a:rPr lang="zh-TW" altLang="en-US" sz="1600" dirty="0">
+                <a:latin typeface="Times New Roman" panose="02020603050405020304" pitchFamily="18" charset="0"/>
+                <a:ea typeface="標楷體" panose="03000509000000000000" pitchFamily="65" charset="-120"/>
+                <a:cs typeface="Times New Roman" panose="02020603050405020304" pitchFamily="18" charset="0"/>
+              </a:rPr>
+              <a:t> </a:t>
+            </a:r>
+            <a:r>
+              <a:rPr lang="en-US" altLang="zh-TW" sz="1600" dirty="0">
+                <a:solidFill>
+                  <a:schemeClr val="tx1"/>
+                </a:solidFill>
+                <a:latin typeface="Times New Roman" panose="02020603050405020304" pitchFamily="18" charset="0"/>
+                <a:ea typeface="標楷體" panose="03000509000000000000" pitchFamily="65" charset="-120"/>
+                <a:cs typeface="Times New Roman" panose="02020603050405020304" pitchFamily="18" charset="0"/>
+              </a:rPr>
+              <a:t>Daughter Board</a:t>
+            </a:r>
+            <a:r>
+              <a:rPr lang="zh-TW" altLang="en-US" sz="1600" dirty="0">
+                <a:solidFill>
+                  <a:schemeClr val="tx1"/>
+                </a:solidFill>
+                <a:latin typeface="Times New Roman" panose="02020603050405020304" pitchFamily="18" charset="0"/>
+                <a:ea typeface="標楷體" panose="03000509000000000000" pitchFamily="65" charset="-120"/>
+                <a:cs typeface="Times New Roman" panose="02020603050405020304" pitchFamily="18" charset="0"/>
+              </a:rPr>
+              <a:t> </a:t>
+            </a:r>
+            <a:r>
+              <a:rPr lang="zh-TW" altLang="zh-TW" sz="1600" dirty="0">
+                <a:latin typeface="Times New Roman" panose="02020603050405020304" pitchFamily="18" charset="0"/>
+                <a:ea typeface="標楷體" panose="03000509000000000000" pitchFamily="65" charset="-120"/>
+                <a:cs typeface="Times New Roman" panose="02020603050405020304" pitchFamily="18" charset="0"/>
+              </a:rPr>
+              <a:t>輸出電壓不一致</a:t>
             </a:r>
             <a:endParaRPr lang="en-US" altLang="zh-TW" sz="1600" dirty="0">
               <a:latin typeface="Times New Roman" panose="02020603050405020304" pitchFamily="18" charset="0"/>
@@ -10723,7 +10944,23 @@
                 <a:ea typeface="標楷體" panose="03000509000000000000" pitchFamily="65" charset="-120"/>
                 <a:cs typeface="Times New Roman" panose="02020603050405020304" pitchFamily="18" charset="0"/>
               </a:rPr>
-              <a:t>阻抗不匹配與高頻訊號反射</a:t>
+              <a:t>阻抗不匹配</a:t>
+            </a:r>
+            <a:r>
+              <a:rPr lang="zh-TW" altLang="en-US" sz="1600" dirty="0">
+                <a:latin typeface="Times New Roman" panose="02020603050405020304" pitchFamily="18" charset="0"/>
+                <a:ea typeface="標楷體" panose="03000509000000000000" pitchFamily="65" charset="-120"/>
+                <a:cs typeface="Times New Roman" panose="02020603050405020304" pitchFamily="18" charset="0"/>
+              </a:rPr>
+              <a:t>產生</a:t>
+            </a:r>
+            <a:r>
+              <a:rPr lang="zh-TW" altLang="zh-TW" sz="1600" dirty="0">
+                <a:latin typeface="Times New Roman" panose="02020603050405020304" pitchFamily="18" charset="0"/>
+                <a:ea typeface="標楷體" panose="03000509000000000000" pitchFamily="65" charset="-120"/>
+                <a:cs typeface="Times New Roman" panose="02020603050405020304" pitchFamily="18" charset="0"/>
+              </a:rPr>
+              <a:t>高頻訊號反射</a:t>
             </a:r>
           </a:p>
         </p:txBody>
@@ -12063,8 +12300,8 @@
         </p:blipFill>
         <p:spPr>
           <a:xfrm>
-            <a:off x="2217519" y="4687212"/>
-            <a:ext cx="5631084" cy="1618733"/>
+            <a:off x="2068218" y="4736454"/>
+            <a:ext cx="5769563" cy="1658541"/>
           </a:xfrm>
           <a:prstGeom prst="rect">
             <a:avLst/>
@@ -12453,7 +12690,7 @@
                 <a:ea typeface="標楷體" panose="03000509000000000000" pitchFamily="65" charset="-120"/>
                 <a:cs typeface="Times New Roman" panose="02020603050405020304" pitchFamily="18" charset="0"/>
               </a:rPr>
-              <a:t>提供 HDMI RX 架構參考</a:t>
+              <a:t>提供 HDMI RX 參考架構</a:t>
             </a:r>
             <a:endParaRPr lang="en-US" altLang="zh-TW" sz="1600" dirty="0">
               <a:solidFill>
@@ -12552,7 +12789,23 @@
                 <a:ea typeface="標楷體" panose="03000509000000000000" pitchFamily="65" charset="-120"/>
                 <a:cs typeface="Times New Roman" panose="02020603050405020304" pitchFamily="18" charset="0"/>
               </a:rPr>
-              <a:t>前端電路可能影響 FPGA RX 的 GT、時鐘配置與 IP 整合</a:t>
+              <a:t>前端電路可能影響 FPGA RX 的 GT、</a:t>
+            </a:r>
+            <a:r>
+              <a:rPr lang="zh-TW" altLang="en-US" sz="1600" dirty="0">
+                <a:latin typeface="Times New Roman" panose="02020603050405020304" pitchFamily="18" charset="0"/>
+                <a:ea typeface="標楷體" panose="03000509000000000000" pitchFamily="65" charset="-120"/>
+                <a:cs typeface="Times New Roman" panose="02020603050405020304" pitchFamily="18" charset="0"/>
+              </a:rPr>
+              <a:t>時脈</a:t>
+            </a:r>
+            <a:r>
+              <a:rPr lang="zh-TW" altLang="zh-TW" sz="1600" dirty="0">
+                <a:latin typeface="Times New Roman" panose="02020603050405020304" pitchFamily="18" charset="0"/>
+                <a:ea typeface="標楷體" panose="03000509000000000000" pitchFamily="65" charset="-120"/>
+                <a:cs typeface="Times New Roman" panose="02020603050405020304" pitchFamily="18" charset="0"/>
+              </a:rPr>
+              <a:t>配置與 IP 整合</a:t>
             </a:r>
             <a:endParaRPr lang="en-US" altLang="zh-TW" sz="2000" dirty="0">
               <a:solidFill>
@@ -12805,7 +13058,7 @@
           <p:nvPr>
             <p:extLst>
               <p:ext uri="{D42A27DB-BD31-4B8C-83A1-F6EECF244321}">
-                <p14:modId xmlns:p14="http://schemas.microsoft.com/office/powerpoint/2010/main" val="4035411007"/>
+                <p14:modId xmlns:p14="http://schemas.microsoft.com/office/powerpoint/2010/main" val="1334287356"/>
               </p:ext>
             </p:extLst>
           </p:nvPr>
@@ -13857,7 +14110,18 @@
                           <a:ea typeface="標楷體" panose="03000509000000000000" pitchFamily="65" charset="-120"/>
                           <a:cs typeface="Times New Roman" panose="02020603050405020304" pitchFamily="18" charset="0"/>
                         </a:rPr>
-                        <a:t>主要風險</a:t>
+                        <a:t>風險</a:t>
+                      </a:r>
+                      <a:r>
+                        <a:rPr lang="zh-TW" altLang="en-US" sz="1600" b="0" dirty="0">
+                          <a:solidFill>
+                            <a:schemeClr val="tx1"/>
+                          </a:solidFill>
+                          <a:latin typeface="Times New Roman" panose="02020603050405020304" pitchFamily="18" charset="0"/>
+                          <a:ea typeface="標楷體" panose="03000509000000000000" pitchFamily="65" charset="-120"/>
+                          <a:cs typeface="Times New Roman" panose="02020603050405020304" pitchFamily="18" charset="0"/>
+                        </a:rPr>
+                        <a:t>與挑戰</a:t>
                       </a:r>
                       <a:endParaRPr lang="zh-TW" altLang="en-US" sz="1600" b="0" i="0" u="none" strike="noStrike" dirty="0">
                         <a:solidFill>
